--- a/ppt/RT-IIPF_Phase1_Review.pptx
+++ b/ppt/RT-IIPF_Phase1_Review.pptx
@@ -2377,7 +2377,7 @@
           <a:lstStyle/>
           <a:p>
             <a:r>
-              <a:t>Key sentence: a blocked transfer never exists in the ledger, so there is nothing to claw back. Mention the 11-12 ms measured decision time.</a:t>
+              <a:t>Key sentence: a blocked transfer never exists in the ledger, so there is nothing to claw back. Mention the 22 ms measured decision time.</a:t>
             </a:r>
           </a:p>
         </p:txBody>
@@ -14809,7 +14809,7 @@
             </a:pPr>
             <a:r>
               <a:rPr lang="en-US" sz="1400" dirty="0"/>
-              <a:t>Achieves an end-to-end decision in 11-12 ms, within the sub-50 ms budget.</a:t>
+              <a:t>Achieves an end-to-end decision in 22 ms, within the sub-50 ms budget.</a:t>
             </a:r>
           </a:p>
         </p:txBody>
@@ -18275,7 +18275,7 @@
             </a:pPr>
             <a:r>
               <a:rPr lang="en-US" sz="1400" dirty="0"/>
-              <a:t>Conventional payment fraud systems operate retrospectively: a transaction settles, logs are analysed later, and recovery is attempted after the money has already moved. On real-time rails such as the Unified Payments Interface (UPI), funds are forwarded and withdrawn within minutes, making recovery largely infeasible. This project proposes RT-IIPF, a framework that relocates the fraud decision inside the payment transaction itself. When a payment arrives, the Spring Boot switch acquires pessimistic locks on both ledger rows, applies the debit and credit provisionally without committing, and suspends the executing thread while an isolated Python microservice scores the transaction using an unsupervised Isolation Forest. A clean verdict commits the ledger; a fraudulent verdict triggers an atomic rollback and locks the payer account, while the audit record survives the rollback through an independent transaction. The prototype achieves an end-to-end decision in 11-12 ms, so a blocked transfer never attains durable existence in the ledger and there is nothing to claw back.</a:t>
+              <a:t>Conventional payment fraud systems operate retrospectively: a transaction settles, logs are analysed later, and recovery is attempted after the money has already moved. On real-time rails such as the Unified Payments Interface (UPI), funds are forwarded and withdrawn within minutes, making recovery largely infeasible. This project proposes RT-IIPF, a framework that relocates the fraud decision inside the payment transaction itself. When a payment arrives, the Spring Boot switch acquires pessimistic locks on both ledger rows, applies the debit and credit provisionally without committing, and suspends the executing thread while an isolated Python microservice scores the transaction using an unsupervised Isolation Forest. A clean verdict commits the ledger; a fraudulent verdict triggers an atomic rollback and locks the payer account, while the audit record survives the rollback through an independent transaction. The prototype achieves an end-to-end decision in 22 ms, so a blocked transfer never attains durable existence in the ledger and there is nothing to claw back.</a:t>
             </a:r>
           </a:p>
         </p:txBody>
